--- a/STARLAB_Slide_Decks_All/09_Data_Organization.pptx
+++ b/STARLAB_Slide_Decks_All/09_Data_Organization.pptx
@@ -2,39 +2,39 @@
 <file path=ppt/presentation.xml><?xml version="1.0" encoding="utf-8"?>
 <p:presentation xmlns:p="http://schemas.openxmlformats.org/presentationml/2006/main" embedTrueTypeFonts="1" saveSubsetFonts="0">
   <p:sldMasterIdLst>
-    <p:sldMasterId xmlns:r="http://schemas.openxmlformats.org/officeDocument/2006/relationships" id="2147483648" r:id="R0ab719550a484b1d"/>
+    <p:sldMasterId xmlns:r="http://schemas.openxmlformats.org/officeDocument/2006/relationships" id="2147483648" r:id="Rc8bad3f3560c4691"/>
   </p:sldMasterIdLst>
   <p:notesMasterIdLst>
-    <p:notesMasterId xmlns:r="http://schemas.openxmlformats.org/officeDocument/2006/relationships" r:id="Rf25f19c83a564518"/>
+    <p:notesMasterId xmlns:r="http://schemas.openxmlformats.org/officeDocument/2006/relationships" r:id="R453205b1c564421b"/>
   </p:notesMasterIdLst>
   <p:sldIdLst>
-    <p:sldId xmlns:r="http://schemas.openxmlformats.org/officeDocument/2006/relationships" id="256" r:id="R44c103996a5a4001"/>
-    <p:sldId xmlns:r="http://schemas.openxmlformats.org/officeDocument/2006/relationships" id="257" r:id="R0af31713cdaf4e21"/>
-    <p:sldId xmlns:r="http://schemas.openxmlformats.org/officeDocument/2006/relationships" id="258" r:id="R85044908dc0d4f29"/>
-    <p:sldId xmlns:r="http://schemas.openxmlformats.org/officeDocument/2006/relationships" id="259" r:id="Rb2106a01c5ca4af6"/>
-    <p:sldId xmlns:r="http://schemas.openxmlformats.org/officeDocument/2006/relationships" id="260" r:id="R98d76ff9e31c4b46"/>
-    <p:sldId xmlns:r="http://schemas.openxmlformats.org/officeDocument/2006/relationships" id="261" r:id="Rfd972255b3404c8a"/>
-    <p:sldId xmlns:r="http://schemas.openxmlformats.org/officeDocument/2006/relationships" id="262" r:id="R3816d86213304117"/>
-    <p:sldId xmlns:r="http://schemas.openxmlformats.org/officeDocument/2006/relationships" id="263" r:id="R29cc100dd5e1472e"/>
-    <p:sldId xmlns:r="http://schemas.openxmlformats.org/officeDocument/2006/relationships" id="264" r:id="Rc99aee3daa53480d"/>
-    <p:sldId xmlns:r="http://schemas.openxmlformats.org/officeDocument/2006/relationships" id="265" r:id="R24a6983368124ff8"/>
-    <p:sldId xmlns:r="http://schemas.openxmlformats.org/officeDocument/2006/relationships" id="266" r:id="Rd3c5f9b310e44a08"/>
-    <p:sldId xmlns:r="http://schemas.openxmlformats.org/officeDocument/2006/relationships" id="267" r:id="R26d680c928344154"/>
-    <p:sldId xmlns:r="http://schemas.openxmlformats.org/officeDocument/2006/relationships" id="268" r:id="R52b3b9f7f767469f"/>
-    <p:sldId xmlns:r="http://schemas.openxmlformats.org/officeDocument/2006/relationships" id="269" r:id="R8365ad259d624afa"/>
-    <p:sldId xmlns:r="http://schemas.openxmlformats.org/officeDocument/2006/relationships" id="270" r:id="R77209a735cca4362"/>
-    <p:sldId xmlns:r="http://schemas.openxmlformats.org/officeDocument/2006/relationships" id="271" r:id="R6a789922cd2f4f68"/>
-    <p:sldId xmlns:r="http://schemas.openxmlformats.org/officeDocument/2006/relationships" id="272" r:id="Rb782093a44664af1"/>
-    <p:sldId xmlns:r="http://schemas.openxmlformats.org/officeDocument/2006/relationships" id="273" r:id="Rd64cbab009ef4ec1"/>
-    <p:sldId xmlns:r="http://schemas.openxmlformats.org/officeDocument/2006/relationships" id="274" r:id="R0573d7c12e6744c0"/>
+    <p:sldId xmlns:r="http://schemas.openxmlformats.org/officeDocument/2006/relationships" id="256" r:id="Rf0d6cb250a47406d"/>
+    <p:sldId xmlns:r="http://schemas.openxmlformats.org/officeDocument/2006/relationships" id="257" r:id="Rbc3402e02475430e"/>
+    <p:sldId xmlns:r="http://schemas.openxmlformats.org/officeDocument/2006/relationships" id="258" r:id="Rfeeaa5487813424a"/>
+    <p:sldId xmlns:r="http://schemas.openxmlformats.org/officeDocument/2006/relationships" id="259" r:id="Rc815d7e77cef4c4c"/>
+    <p:sldId xmlns:r="http://schemas.openxmlformats.org/officeDocument/2006/relationships" id="260" r:id="R51ad4e920fee4b71"/>
+    <p:sldId xmlns:r="http://schemas.openxmlformats.org/officeDocument/2006/relationships" id="261" r:id="Rbf801ae1849f43b9"/>
+    <p:sldId xmlns:r="http://schemas.openxmlformats.org/officeDocument/2006/relationships" id="262" r:id="R11e243054ae14a78"/>
+    <p:sldId xmlns:r="http://schemas.openxmlformats.org/officeDocument/2006/relationships" id="263" r:id="Red4ec9789bfe4cb3"/>
+    <p:sldId xmlns:r="http://schemas.openxmlformats.org/officeDocument/2006/relationships" id="264" r:id="R3a6fffcf9f234698"/>
+    <p:sldId xmlns:r="http://schemas.openxmlformats.org/officeDocument/2006/relationships" id="265" r:id="R55c5dd13362b4280"/>
+    <p:sldId xmlns:r="http://schemas.openxmlformats.org/officeDocument/2006/relationships" id="266" r:id="Rac643049e6be474b"/>
+    <p:sldId xmlns:r="http://schemas.openxmlformats.org/officeDocument/2006/relationships" id="267" r:id="R176ef8f512ed4033"/>
+    <p:sldId xmlns:r="http://schemas.openxmlformats.org/officeDocument/2006/relationships" id="268" r:id="Rf5d569a8bb7d470d"/>
+    <p:sldId xmlns:r="http://schemas.openxmlformats.org/officeDocument/2006/relationships" id="269" r:id="R58f07283c4bd467b"/>
+    <p:sldId xmlns:r="http://schemas.openxmlformats.org/officeDocument/2006/relationships" id="270" r:id="Ref80bdb9f6b74d6c"/>
+    <p:sldId xmlns:r="http://schemas.openxmlformats.org/officeDocument/2006/relationships" id="271" r:id="R25ec0341ef9b4651"/>
+    <p:sldId xmlns:r="http://schemas.openxmlformats.org/officeDocument/2006/relationships" id="272" r:id="R3e5b96fe9d3a4ad7"/>
+    <p:sldId xmlns:r="http://schemas.openxmlformats.org/officeDocument/2006/relationships" id="273" r:id="R4755ed578428497d"/>
+    <p:sldId xmlns:r="http://schemas.openxmlformats.org/officeDocument/2006/relationships" id="274" r:id="R2839446eea17432e"/>
   </p:sldIdLst>
   <p:sldSz cx="12191675" cy="6858000"/>
   <p:notesSz cx="6858000" cy="9144000"/>
   <p:embeddedFontLst>
     <p:embeddedFont>
       <p:font typeface="Play"/>
-      <p:regular xmlns:r="http://schemas.openxmlformats.org/officeDocument/2006/relationships" r:id="Rb071e1833e044f23"/>
-      <p:bold xmlns:r="http://schemas.openxmlformats.org/officeDocument/2006/relationships" r:id="R3f9667fd3f624463"/>
+      <p:regular xmlns:r="http://schemas.openxmlformats.org/officeDocument/2006/relationships" r:id="Re506f0fce5f04ee5"/>
+      <p:bold xmlns:r="http://schemas.openxmlformats.org/officeDocument/2006/relationships" r:id="Re4bfc267baed427f"/>
     </p:embeddedFont>
   </p:embeddedFontLst>
   <p:defaultTextStyle>
@@ -670,7 +670,7 @@
               <a:buNone/>
             </a:pPr>
             <a:r>
-              <a:t>REVISIT / SECONDARY USE</a:t>
+              <a:t>REVISIT / REFERENCE</a:t>
             </a:r>
           </a:p>
           <a:p xmlns:a="http://schemas.openxmlformats.org/drawingml/2006/main">
@@ -688,7 +688,7 @@
               <a:buNone/>
             </a:pPr>
             <a:r>
-              <a:t>Unit 3, Week 16 readiness transition</a:t>
+              <a:t>Unit 3, Week 9 as needed for data-quality concepts</a:t>
             </a:r>
           </a:p>
           <a:p xmlns:a="http://schemas.openxmlformats.org/drawingml/2006/main">
@@ -706,6 +706,24 @@
               <a:buNone/>
             </a:pPr>
             <a:r>
+              <a:t>Unit 3, Week 16 for analysis readiness</a:t>
+            </a:r>
+          </a:p>
+          <a:p xmlns:a="http://schemas.openxmlformats.org/drawingml/2006/main">
+            <a:pPr marL="457200" marR="0" indent="-228600" algn="l">
+              <a:lnSpc>
+                <a:spcPct val="100000"/>
+              </a:lnSpc>
+              <a:spcBef>
+                <a:spcPts val="0"/>
+              </a:spcBef>
+              <a:spcAft>
+                <a:spcPts val="0"/>
+              </a:spcAft>
+              <a:buSzPts val="1400"/>
+              <a:buNone/>
+            </a:pPr>
+            <a:r>
               <a:t/>
             </a:r>
           </a:p>
@@ -724,6 +742,78 @@
               <a:buNone/>
             </a:pPr>
             <a:r>
+              <a:t>WEEK 9 REVISIT MATERIALS</a:t>
+            </a:r>
+          </a:p>
+          <a:p xmlns:a="http://schemas.openxmlformats.org/drawingml/2006/main">
+            <a:pPr marL="457200" marR="0" indent="-228600" algn="l">
+              <a:lnSpc>
+                <a:spcPct val="100000"/>
+              </a:lnSpc>
+              <a:spcBef>
+                <a:spcPts val="0"/>
+              </a:spcBef>
+              <a:spcAft>
+                <a:spcPts val="0"/>
+              </a:spcAft>
+              <a:buSzPts val="1400"/>
+              <a:buNone/>
+            </a:pPr>
+            <a:r>
+              <a:t>- Unit 3 Student Handouts 9-10</a:t>
+            </a:r>
+          </a:p>
+          <a:p xmlns:a="http://schemas.openxmlformats.org/drawingml/2006/main">
+            <a:pPr marL="457200" marR="0" indent="-228600" algn="l">
+              <a:lnSpc>
+                <a:spcPct val="100000"/>
+              </a:lnSpc>
+              <a:spcBef>
+                <a:spcPts val="0"/>
+              </a:spcBef>
+              <a:spcAft>
+                <a:spcPts val="0"/>
+              </a:spcAft>
+              <a:buSzPts val="1400"/>
+              <a:buNone/>
+            </a:pPr>
+            <a:r>
+              <a:t>- Unit 3 Appendix J is optional / teacher reference</a:t>
+            </a:r>
+          </a:p>
+          <a:p xmlns:a="http://schemas.openxmlformats.org/drawingml/2006/main">
+            <a:pPr marL="457200" marR="0" indent="-228600" algn="l">
+              <a:lnSpc>
+                <a:spcPct val="100000"/>
+              </a:lnSpc>
+              <a:spcBef>
+                <a:spcPts val="0"/>
+              </a:spcBef>
+              <a:spcAft>
+                <a:spcPts val="0"/>
+              </a:spcAft>
+              <a:buSzPts val="1400"/>
+              <a:buNone/>
+            </a:pPr>
+            <a:r>
+              <a:t/>
+            </a:r>
+          </a:p>
+          <a:p xmlns:a="http://schemas.openxmlformats.org/drawingml/2006/main">
+            <a:pPr marL="457200" marR="0" indent="-228600" algn="l">
+              <a:lnSpc>
+                <a:spcPct val="100000"/>
+              </a:lnSpc>
+              <a:spcBef>
+                <a:spcPts val="0"/>
+              </a:spcBef>
+              <a:spcAft>
+                <a:spcPts val="0"/>
+              </a:spcAft>
+              <a:buSzPts val="1400"/>
+              <a:buNone/>
+            </a:pPr>
+            <a:r>
               <a:t>REQUIRED WEEK 15 MATERIALS</a:t>
             </a:r>
           </a:p>
@@ -742,7 +832,7 @@
               <a:buNone/>
             </a:pPr>
             <a:r>
-              <a:t>- Unit 3 Student Handout 17: Data Audit and Organization Checklist</a:t>
+              <a:t>- Unit 3 Student Handout 17</a:t>
             </a:r>
           </a:p>
           <a:p xmlns:a="http://schemas.openxmlformats.org/drawingml/2006/main">
@@ -814,7 +904,7 @@
               <a:buNone/>
             </a:pPr>
             <a:r>
-              <a:t>- Unit 3 Student Handout 18: Unit 3 Readiness for Analysis Review</a:t>
+              <a:t>- Unit 3 Student Handouts 18-19</a:t>
             </a:r>
           </a:p>
           <a:p xmlns:a="http://schemas.openxmlformats.org/drawingml/2006/main">
@@ -832,7 +922,7 @@
               <a:buNone/>
             </a:pPr>
             <a:r>
-              <a:t>- Unit 3 Student Handout 19: Research Journal Self-Assessment</a:t>
+              <a:t>- Unit 3 Appendices S-U are optional / teacher reference</a:t>
             </a:r>
           </a:p>
           <a:p xmlns:a="http://schemas.openxmlformats.org/drawingml/2006/main">
@@ -868,7 +958,7 @@
               <a:buNone/>
             </a:pPr>
             <a:r>
-              <a:t>OPTIONAL / TEACHER REFERENCE FOR WEEK 16</a:t>
+              <a:t>REQUIRED WEEK 17 MATERIALS</a:t>
             </a:r>
           </a:p>
           <a:p xmlns:a="http://schemas.openxmlformats.org/drawingml/2006/main">
@@ -886,7 +976,7 @@
               <a:buNone/>
             </a:pPr>
             <a:r>
-              <a:t>- Unit 3 Appendices S-U</a:t>
+              <a:t>- Unit 4 Student Handouts 1-4</a:t>
             </a:r>
           </a:p>
           <a:p xmlns:a="http://schemas.openxmlformats.org/drawingml/2006/main">
@@ -904,6 +994,24 @@
               <a:buNone/>
             </a:pPr>
             <a:r>
+              <a:t>- Unit 4 Appendices A-C</a:t>
+            </a:r>
+          </a:p>
+          <a:p xmlns:a="http://schemas.openxmlformats.org/drawingml/2006/main">
+            <a:pPr marL="457200" marR="0" indent="-228600" algn="l">
+              <a:lnSpc>
+                <a:spcPct val="100000"/>
+              </a:lnSpc>
+              <a:spcBef>
+                <a:spcPts val="0"/>
+              </a:spcBef>
+              <a:spcAft>
+                <a:spcPts val="0"/>
+              </a:spcAft>
+              <a:buSzPts val="1400"/>
+              <a:buNone/>
+            </a:pPr>
+            <a:r>
               <a:t/>
             </a:r>
           </a:p>
@@ -922,7 +1030,7 @@
               <a:buNone/>
             </a:pPr>
             <a:r>
-              <a:t>REQUIRED WEEK 17 MATERIALS</a:t>
+              <a:t>RESOURCE ALIGNMENT</a:t>
             </a:r>
           </a:p>
           <a:p xmlns:a="http://schemas.openxmlformats.org/drawingml/2006/main">
@@ -940,79 +1048,7 @@
               <a:buNone/>
             </a:pPr>
             <a:r>
-              <a:t>- Unit 4 Student Handouts 1-4</a:t>
-            </a:r>
-          </a:p>
-          <a:p xmlns:a="http://schemas.openxmlformats.org/drawingml/2006/main">
-            <a:pPr marL="457200" marR="0" indent="-228600" algn="l">
-              <a:lnSpc>
-                <a:spcPct val="100000"/>
-              </a:lnSpc>
-              <a:spcBef>
-                <a:spcPts val="0"/>
-              </a:spcBef>
-              <a:spcAft>
-                <a:spcPts val="0"/>
-              </a:spcAft>
-              <a:buSzPts val="1400"/>
-              <a:buNone/>
-            </a:pPr>
-            <a:r>
-              <a:t>- Unit 4 Appendices A-C</a:t>
-            </a:r>
-          </a:p>
-          <a:p xmlns:a="http://schemas.openxmlformats.org/drawingml/2006/main">
-            <a:pPr marL="457200" marR="0" indent="-228600" algn="l">
-              <a:lnSpc>
-                <a:spcPct val="100000"/>
-              </a:lnSpc>
-              <a:spcBef>
-                <a:spcPts val="0"/>
-              </a:spcBef>
-              <a:spcAft>
-                <a:spcPts val="0"/>
-              </a:spcAft>
-              <a:buSzPts val="1400"/>
-              <a:buNone/>
-            </a:pPr>
-            <a:r>
-              <a:t/>
-            </a:r>
-          </a:p>
-          <a:p xmlns:a="http://schemas.openxmlformats.org/drawingml/2006/main">
-            <a:pPr marL="457200" marR="0" indent="-228600" algn="l">
-              <a:lnSpc>
-                <a:spcPct val="100000"/>
-              </a:lnSpc>
-              <a:spcBef>
-                <a:spcPts val="0"/>
-              </a:spcBef>
-              <a:spcAft>
-                <a:spcPts val="0"/>
-              </a:spcAft>
-              <a:buSzPts val="1400"/>
-              <a:buNone/>
-            </a:pPr>
-            <a:r>
-              <a:t>RESOURCE ALIGNMENT</a:t>
-            </a:r>
-          </a:p>
-          <a:p xmlns:a="http://schemas.openxmlformats.org/drawingml/2006/main">
-            <a:pPr marL="457200" marR="0" indent="-228600" algn="l">
-              <a:lnSpc>
-                <a:spcPct val="100000"/>
-              </a:lnSpc>
-              <a:spcBef>
-                <a:spcPts val="0"/>
-              </a:spcBef>
-              <a:spcAft>
-                <a:spcPts val="0"/>
-              </a:spcAft>
-              <a:buSzPts val="1400"/>
-              <a:buNone/>
-            </a:pPr>
-            <a:r>
-              <a:t>Use this deck as the Week 15 data-organization bridge, revisit it in Week 16 for readiness, and teach it again at the Unit 4 launch. Preserve raw data and document every cleaning decision.</a:t>
+              <a:t>Reference concepts in Week 9 only when useful, teach the deck in Week 15, revisit it in Week 16, and teach it again at the Unit 4 launch.</a:t>
             </a:r>
           </a:p>
         </p:txBody>
@@ -3872,7 +3908,7 @@
   </p:cSld>
   <p:clrMap bg1="lt1" tx1="dk1" bg2="dk2" tx2="lt2" accent1="accent1" accent2="accent2" accent3="accent3" accent4="accent4" accent5="accent5" accent6="accent6" hlink="hlink" folHlink="folHlink"/>
   <p:sldLayoutIdLst>
-    <p:sldLayoutId xmlns:r="http://schemas.openxmlformats.org/officeDocument/2006/relationships" id="2147483649" r:id="R2cad66e556004446"/>
+    <p:sldLayoutId xmlns:r="http://schemas.openxmlformats.org/officeDocument/2006/relationships" id="2147483649" r:id="Rd3c4bf6980d44937"/>
   </p:sldLayoutIdLst>
   <p:hf sldNum="0" hdr="0" ftr="0" dt="0"/>
   <p:txStyles>
@@ -4823,7 +4859,7 @@
       </p:grpSpPr>
       <p:cxnSp>
         <p:nvCxnSpPr>
-          <p:cNvPr id="23" name="Google Shape;16;p3"/>
+          <p:cNvPr id="26" name="Google Shape;16;p3"/>
           <p:cNvCxnSpPr/>
           <p:nvPr/>
         </p:nvCxnSpPr>
@@ -4848,7 +4884,7 @@
       </p:cxnSp>
       <p:cxnSp>
         <p:nvCxnSpPr>
-          <p:cNvPr id="24" name="Google Shape;17;p3"/>
+          <p:cNvPr id="27" name="Google Shape;17;p3"/>
           <p:cNvCxnSpPr/>
           <p:nvPr/>
         </p:nvCxnSpPr>
@@ -4873,14 +4909,14 @@
       </p:cxnSp>
       <p:pic>
         <p:nvPicPr>
-          <p:cNvPr id="25" name="Google Shape;18;p3"/>
+          <p:cNvPr id="28" name="Google Shape;18;p3"/>
           <p:cNvPicPr>
             <a:picLocks xmlns:a="http://schemas.openxmlformats.org/drawingml/2006/main" noChangeAspect="1"/>
           </p:cNvPicPr>
           <p:nvPr/>
         </p:nvPicPr>
         <p:blipFill rotWithShape="1">
-          <a:blip xmlns:r="http://schemas.openxmlformats.org/officeDocument/2006/relationships" xmlns:a="http://schemas.openxmlformats.org/drawingml/2006/main" r:embed="Rcda0ddb8b9be4376">
+          <a:blip xmlns:r="http://schemas.openxmlformats.org/officeDocument/2006/relationships" xmlns:a="http://schemas.openxmlformats.org/drawingml/2006/main" r:embed="R80ea726ece9e4b18">
             <a:alphaModFix/>
           </a:blip>
           <a:srcRect xmlns:a="http://schemas.openxmlformats.org/drawingml/2006/main" l="0" t="0" r="0" b="0"/>
@@ -5123,7 +5159,7 @@
       </p:grpSpPr>
       <p:cxnSp>
         <p:nvCxnSpPr>
-          <p:cNvPr id="261" name="Google Shape;224;p12"/>
+          <p:cNvPr id="268" name="Google Shape;224;p12"/>
           <p:cNvCxnSpPr/>
           <p:nvPr/>
         </p:nvCxnSpPr>
@@ -5148,7 +5184,7 @@
       </p:cxnSp>
       <p:cxnSp>
         <p:nvCxnSpPr>
-          <p:cNvPr id="262" name="Google Shape;225;p12"/>
+          <p:cNvPr id="269" name="Google Shape;225;p12"/>
           <p:cNvCxnSpPr/>
           <p:nvPr/>
         </p:nvCxnSpPr>
@@ -5429,7 +5465,7 @@
       </p:sp>
       <p:cxnSp>
         <p:nvCxnSpPr>
-          <p:cNvPr id="267" name="Google Shape;230;p12"/>
+          <p:cNvPr id="274" name="Google Shape;230;p12"/>
           <p:cNvCxnSpPr/>
           <p:nvPr/>
         </p:nvCxnSpPr>
@@ -7386,7 +7422,7 @@
       </p:grpSpPr>
       <p:cxnSp>
         <p:nvCxnSpPr>
-          <p:cNvPr id="291" name="Google Shape;266;p13"/>
+          <p:cNvPr id="298" name="Google Shape;266;p13"/>
           <p:cNvCxnSpPr/>
           <p:nvPr/>
         </p:nvCxnSpPr>
@@ -7411,7 +7447,7 @@
       </p:cxnSp>
       <p:cxnSp>
         <p:nvCxnSpPr>
-          <p:cNvPr id="292" name="Google Shape;267;p13"/>
+          <p:cNvPr id="299" name="Google Shape;267;p13"/>
           <p:cNvCxnSpPr/>
           <p:nvPr/>
         </p:nvCxnSpPr>
@@ -7692,7 +7728,7 @@
       </p:sp>
       <p:cxnSp>
         <p:nvCxnSpPr>
-          <p:cNvPr id="297" name="Google Shape;272;p13"/>
+          <p:cNvPr id="304" name="Google Shape;272;p13"/>
           <p:cNvCxnSpPr/>
           <p:nvPr/>
         </p:nvCxnSpPr>
@@ -8899,7 +8935,7 @@
       </p:grpSpPr>
       <p:cxnSp>
         <p:nvCxnSpPr>
-          <p:cNvPr id="310" name="Google Shape;296;p14"/>
+          <p:cNvPr id="317" name="Google Shape;296;p14"/>
           <p:cNvCxnSpPr/>
           <p:nvPr/>
         </p:nvCxnSpPr>
@@ -8924,7 +8960,7 @@
       </p:cxnSp>
       <p:cxnSp>
         <p:nvCxnSpPr>
-          <p:cNvPr id="311" name="Google Shape;297;p14"/>
+          <p:cNvPr id="318" name="Google Shape;297;p14"/>
           <p:cNvCxnSpPr/>
           <p:nvPr/>
         </p:nvCxnSpPr>
@@ -9205,7 +9241,7 @@
       </p:sp>
       <p:cxnSp>
         <p:nvCxnSpPr>
-          <p:cNvPr id="316" name="Google Shape;302;p14"/>
+          <p:cNvPr id="323" name="Google Shape;302;p14"/>
           <p:cNvCxnSpPr/>
           <p:nvPr/>
         </p:nvCxnSpPr>
@@ -9947,7 +9983,7 @@
       </p:grpSpPr>
       <p:cxnSp>
         <p:nvCxnSpPr>
-          <p:cNvPr id="336" name="Google Shape;315;p15"/>
+          <p:cNvPr id="343" name="Google Shape;315;p15"/>
           <p:cNvCxnSpPr/>
           <p:nvPr/>
         </p:nvCxnSpPr>
@@ -9972,7 +10008,7 @@
       </p:cxnSp>
       <p:cxnSp>
         <p:nvCxnSpPr>
-          <p:cNvPr id="337" name="Google Shape;316;p15"/>
+          <p:cNvPr id="344" name="Google Shape;316;p15"/>
           <p:cNvCxnSpPr/>
           <p:nvPr/>
         </p:nvCxnSpPr>
@@ -10253,7 +10289,7 @@
       </p:sp>
       <p:cxnSp>
         <p:nvCxnSpPr>
-          <p:cNvPr id="342" name="Google Shape;321;p15"/>
+          <p:cNvPr id="349" name="Google Shape;321;p15"/>
           <p:cNvCxnSpPr/>
           <p:nvPr/>
         </p:nvCxnSpPr>
@@ -11259,7 +11295,7 @@
       </p:grpSpPr>
       <p:cxnSp>
         <p:nvCxnSpPr>
-          <p:cNvPr id="358" name="Google Shape;341;p16"/>
+          <p:cNvPr id="365" name="Google Shape;341;p16"/>
           <p:cNvCxnSpPr/>
           <p:nvPr/>
         </p:nvCxnSpPr>
@@ -11284,7 +11320,7 @@
       </p:cxnSp>
       <p:cxnSp>
         <p:nvCxnSpPr>
-          <p:cNvPr id="359" name="Google Shape;342;p16"/>
+          <p:cNvPr id="366" name="Google Shape;342;p16"/>
           <p:cNvCxnSpPr/>
           <p:nvPr/>
         </p:nvCxnSpPr>
@@ -11565,7 +11601,7 @@
       </p:sp>
       <p:cxnSp>
         <p:nvCxnSpPr>
-          <p:cNvPr id="364" name="Google Shape;347;p16"/>
+          <p:cNvPr id="371" name="Google Shape;347;p16"/>
           <p:cNvCxnSpPr/>
           <p:nvPr/>
         </p:nvCxnSpPr>
@@ -12527,7 +12563,7 @@
       </p:grpSpPr>
       <p:cxnSp>
         <p:nvCxnSpPr>
-          <p:cNvPr id="377" name="Google Shape;363;p17"/>
+          <p:cNvPr id="384" name="Google Shape;363;p17"/>
           <p:cNvCxnSpPr/>
           <p:nvPr/>
         </p:nvCxnSpPr>
@@ -12552,7 +12588,7 @@
       </p:cxnSp>
       <p:cxnSp>
         <p:nvCxnSpPr>
-          <p:cNvPr id="378" name="Google Shape;364;p17"/>
+          <p:cNvPr id="385" name="Google Shape;364;p17"/>
           <p:cNvCxnSpPr/>
           <p:nvPr/>
         </p:nvCxnSpPr>
@@ -12833,7 +12869,7 @@
       </p:sp>
       <p:cxnSp>
         <p:nvCxnSpPr>
-          <p:cNvPr id="383" name="Google Shape;369;p17"/>
+          <p:cNvPr id="390" name="Google Shape;369;p17"/>
           <p:cNvCxnSpPr/>
           <p:nvPr/>
         </p:nvCxnSpPr>
@@ -13455,7 +13491,7 @@
       </p:grpSpPr>
       <p:cxnSp>
         <p:nvCxnSpPr>
-          <p:cNvPr id="394" name="Google Shape;382;p18"/>
+          <p:cNvPr id="401" name="Google Shape;382;p18"/>
           <p:cNvCxnSpPr/>
           <p:nvPr/>
         </p:nvCxnSpPr>
@@ -13480,7 +13516,7 @@
       </p:cxnSp>
       <p:cxnSp>
         <p:nvCxnSpPr>
-          <p:cNvPr id="395" name="Google Shape;383;p18"/>
+          <p:cNvPr id="402" name="Google Shape;383;p18"/>
           <p:cNvCxnSpPr/>
           <p:nvPr/>
         </p:nvCxnSpPr>
@@ -13761,7 +13797,7 @@
       </p:sp>
       <p:cxnSp>
         <p:nvCxnSpPr>
-          <p:cNvPr id="400" name="Google Shape;388;p18"/>
+          <p:cNvPr id="407" name="Google Shape;388;p18"/>
           <p:cNvCxnSpPr/>
           <p:nvPr/>
         </p:nvCxnSpPr>
@@ -14315,7 +14351,7 @@
       </p:grpSpPr>
       <p:cxnSp>
         <p:nvCxnSpPr>
-          <p:cNvPr id="430" name="Google Shape;399;p19"/>
+          <p:cNvPr id="437" name="Google Shape;399;p19"/>
           <p:cNvCxnSpPr/>
           <p:nvPr/>
         </p:nvCxnSpPr>
@@ -14340,7 +14376,7 @@
       </p:cxnSp>
       <p:cxnSp>
         <p:nvCxnSpPr>
-          <p:cNvPr id="431" name="Google Shape;400;p19"/>
+          <p:cNvPr id="438" name="Google Shape;400;p19"/>
           <p:cNvCxnSpPr/>
           <p:nvPr/>
         </p:nvCxnSpPr>
@@ -14621,7 +14657,7 @@
       </p:sp>
       <p:cxnSp>
         <p:nvCxnSpPr>
-          <p:cNvPr id="436" name="Google Shape;405;p19"/>
+          <p:cNvPr id="443" name="Google Shape;405;p19"/>
           <p:cNvCxnSpPr/>
           <p:nvPr/>
         </p:nvCxnSpPr>
@@ -16205,7 +16241,7 @@
       </p:grpSpPr>
       <p:cxnSp>
         <p:nvCxnSpPr>
-          <p:cNvPr id="449" name="Google Shape;435;p20"/>
+          <p:cNvPr id="456" name="Google Shape;435;p20"/>
           <p:cNvCxnSpPr/>
           <p:nvPr/>
         </p:nvCxnSpPr>
@@ -16230,7 +16266,7 @@
       </p:cxnSp>
       <p:cxnSp>
         <p:nvCxnSpPr>
-          <p:cNvPr id="450" name="Google Shape;436;p20"/>
+          <p:cNvPr id="457" name="Google Shape;436;p20"/>
           <p:cNvCxnSpPr/>
           <p:nvPr/>
         </p:nvCxnSpPr>
@@ -16511,7 +16547,7 @@
       </p:sp>
       <p:cxnSp>
         <p:nvCxnSpPr>
-          <p:cNvPr id="455" name="Google Shape;441;p20"/>
+          <p:cNvPr id="462" name="Google Shape;441;p20"/>
           <p:cNvCxnSpPr/>
           <p:nvPr/>
         </p:nvCxnSpPr>
@@ -17193,7 +17229,7 @@
       </p:grpSpPr>
       <p:cxnSp>
         <p:nvCxnSpPr>
-          <p:cNvPr id="463" name="Google Shape;454;p21"/>
+          <p:cNvPr id="471" name="Google Shape;454;p21"/>
           <p:cNvCxnSpPr/>
           <p:nvPr/>
         </p:nvCxnSpPr>
@@ -17218,7 +17254,7 @@
       </p:cxnSp>
       <p:cxnSp>
         <p:nvCxnSpPr>
-          <p:cNvPr id="464" name="Google Shape;455;p21"/>
+          <p:cNvPr id="472" name="Google Shape;455;p21"/>
           <p:cNvCxnSpPr/>
           <p:nvPr/>
         </p:nvCxnSpPr>
@@ -17499,7 +17535,7 @@
       </p:sp>
       <p:cxnSp>
         <p:nvCxnSpPr>
-          <p:cNvPr id="469" name="Google Shape;460;p21"/>
+          <p:cNvPr id="477" name="Google Shape;460;p21"/>
           <p:cNvCxnSpPr/>
           <p:nvPr/>
         </p:nvCxnSpPr>
@@ -17588,14 +17624,14 @@
       </p:sp>
       <p:pic>
         <p:nvPicPr>
-          <p:cNvPr id="471" name="Google Shape;462;p21"/>
+          <p:cNvPr id="479" name="Google Shape;462;p21"/>
           <p:cNvPicPr>
             <a:picLocks xmlns:a="http://schemas.openxmlformats.org/drawingml/2006/main" noChangeAspect="1"/>
           </p:cNvPicPr>
           <p:nvPr/>
         </p:nvPicPr>
         <p:blipFill rotWithShape="1">
-          <a:blip xmlns:r="http://schemas.openxmlformats.org/officeDocument/2006/relationships" xmlns:a="http://schemas.openxmlformats.org/drawingml/2006/main" r:embed="R4e5ba148b4784850">
+          <a:blip xmlns:r="http://schemas.openxmlformats.org/officeDocument/2006/relationships" xmlns:a="http://schemas.openxmlformats.org/drawingml/2006/main" r:embed="R8774106ba9b644e5">
             <a:alphaModFix/>
           </a:blip>
           <a:srcRect xmlns:a="http://schemas.openxmlformats.org/drawingml/2006/main" l="0" t="0" r="0" b="0"/>
@@ -17645,7 +17681,7 @@
       </p:grpSpPr>
       <p:cxnSp>
         <p:nvCxnSpPr>
-          <p:cNvPr id="48" name="Google Shape;27;p4"/>
+          <p:cNvPr id="55" name="Google Shape;27;p4"/>
           <p:cNvCxnSpPr/>
           <p:nvPr/>
         </p:nvCxnSpPr>
@@ -17670,7 +17706,7 @@
       </p:cxnSp>
       <p:cxnSp>
         <p:nvCxnSpPr>
-          <p:cNvPr id="49" name="Google Shape;28;p4"/>
+          <p:cNvPr id="56" name="Google Shape;28;p4"/>
           <p:cNvCxnSpPr/>
           <p:nvPr/>
         </p:nvCxnSpPr>
@@ -17951,7 +17987,7 @@
       </p:sp>
       <p:cxnSp>
         <p:nvCxnSpPr>
-          <p:cNvPr id="54" name="Google Shape;33;p4"/>
+          <p:cNvPr id="61" name="Google Shape;33;p4"/>
           <p:cNvCxnSpPr/>
           <p:nvPr/>
         </p:nvCxnSpPr>
@@ -18987,7 +19023,7 @@
       </p:grpSpPr>
       <p:cxnSp>
         <p:nvCxnSpPr>
-          <p:cNvPr id="66" name="Google Shape;53;p5"/>
+          <p:cNvPr id="73" name="Google Shape;53;p5"/>
           <p:cNvCxnSpPr/>
           <p:nvPr/>
         </p:nvCxnSpPr>
@@ -19012,7 +19048,7 @@
       </p:cxnSp>
       <p:cxnSp>
         <p:nvCxnSpPr>
-          <p:cNvPr id="67" name="Google Shape;54;p5"/>
+          <p:cNvPr id="74" name="Google Shape;54;p5"/>
           <p:cNvCxnSpPr/>
           <p:nvPr/>
         </p:nvCxnSpPr>
@@ -19293,7 +19329,7 @@
       </p:sp>
       <p:cxnSp>
         <p:nvCxnSpPr>
-          <p:cNvPr id="72" name="Google Shape;59;p5"/>
+          <p:cNvPr id="79" name="Google Shape;59;p5"/>
           <p:cNvCxnSpPr/>
           <p:nvPr/>
         </p:nvCxnSpPr>
@@ -19881,7 +19917,7 @@
       </p:grpSpPr>
       <p:cxnSp>
         <p:nvCxnSpPr>
-          <p:cNvPr id="85" name="Google Shape;71;p6"/>
+          <p:cNvPr id="92" name="Google Shape;71;p6"/>
           <p:cNvCxnSpPr/>
           <p:nvPr/>
         </p:nvCxnSpPr>
@@ -19906,7 +19942,7 @@
       </p:cxnSp>
       <p:cxnSp>
         <p:nvCxnSpPr>
-          <p:cNvPr id="86" name="Google Shape;72;p6"/>
+          <p:cNvPr id="93" name="Google Shape;72;p6"/>
           <p:cNvCxnSpPr/>
           <p:nvPr/>
         </p:nvCxnSpPr>
@@ -20187,7 +20223,7 @@
       </p:sp>
       <p:cxnSp>
         <p:nvCxnSpPr>
-          <p:cNvPr id="91" name="Google Shape;77;p6"/>
+          <p:cNvPr id="98" name="Google Shape;77;p6"/>
           <p:cNvCxnSpPr/>
           <p:nvPr/>
         </p:nvCxnSpPr>
@@ -20839,7 +20875,7 @@
       </p:grpSpPr>
       <p:cxnSp>
         <p:nvCxnSpPr>
-          <p:cNvPr id="103" name="Google Shape;90;p7"/>
+          <p:cNvPr id="110" name="Google Shape;90;p7"/>
           <p:cNvCxnSpPr/>
           <p:nvPr/>
         </p:nvCxnSpPr>
@@ -20864,7 +20900,7 @@
       </p:cxnSp>
       <p:cxnSp>
         <p:nvCxnSpPr>
-          <p:cNvPr id="104" name="Google Shape;91;p7"/>
+          <p:cNvPr id="111" name="Google Shape;91;p7"/>
           <p:cNvCxnSpPr/>
           <p:nvPr/>
         </p:nvCxnSpPr>
@@ -21145,7 +21181,7 @@
       </p:sp>
       <p:cxnSp>
         <p:nvCxnSpPr>
-          <p:cNvPr id="109" name="Google Shape;96;p7"/>
+          <p:cNvPr id="116" name="Google Shape;96;p7"/>
           <p:cNvCxnSpPr/>
           <p:nvPr/>
         </p:nvCxnSpPr>
@@ -21853,7 +21889,7 @@
       </p:grpSpPr>
       <p:cxnSp>
         <p:nvCxnSpPr>
-          <p:cNvPr id="121" name="Google Shape;108;p8"/>
+          <p:cNvPr id="128" name="Google Shape;108;p8"/>
           <p:cNvCxnSpPr/>
           <p:nvPr/>
         </p:nvCxnSpPr>
@@ -21878,7 +21914,7 @@
       </p:cxnSp>
       <p:cxnSp>
         <p:nvCxnSpPr>
-          <p:cNvPr id="122" name="Google Shape;109;p8"/>
+          <p:cNvPr id="129" name="Google Shape;109;p8"/>
           <p:cNvCxnSpPr/>
           <p:nvPr/>
         </p:nvCxnSpPr>
@@ -22159,7 +22195,7 @@
       </p:sp>
       <p:cxnSp>
         <p:nvCxnSpPr>
-          <p:cNvPr id="127" name="Google Shape;114;p8"/>
+          <p:cNvPr id="134" name="Google Shape;114;p8"/>
           <p:cNvCxnSpPr/>
           <p:nvPr/>
         </p:nvCxnSpPr>
@@ -22837,7 +22873,7 @@
       </p:grpSpPr>
       <p:cxnSp>
         <p:nvCxnSpPr>
-          <p:cNvPr id="160" name="Google Shape;126;p9"/>
+          <p:cNvPr id="183" name="Google Shape;126;p9"/>
           <p:cNvCxnSpPr/>
           <p:nvPr/>
         </p:nvCxnSpPr>
@@ -22862,7 +22898,7 @@
       </p:cxnSp>
       <p:cxnSp>
         <p:nvCxnSpPr>
-          <p:cNvPr id="161" name="Google Shape;127;p9"/>
+          <p:cNvPr id="184" name="Google Shape;127;p9"/>
           <p:cNvCxnSpPr/>
           <p:nvPr/>
         </p:nvCxnSpPr>
@@ -23143,7 +23179,7 @@
       </p:sp>
       <p:cxnSp>
         <p:nvCxnSpPr>
-          <p:cNvPr id="166" name="Google Shape;132;p9"/>
+          <p:cNvPr id="189" name="Google Shape;132;p9"/>
           <p:cNvCxnSpPr/>
           <p:nvPr/>
         </p:nvCxnSpPr>
@@ -23391,7 +23427,7 @@
       </p:sp>
       <p:cxnSp>
         <p:nvCxnSpPr>
-          <p:cNvPr id="170" name="Google Shape;136;p9"/>
+          <p:cNvPr id="193" name="Google Shape;136;p9"/>
           <p:cNvCxnSpPr/>
           <p:nvPr/>
         </p:nvCxnSpPr>
@@ -23607,7 +23643,7 @@
       </p:sp>
       <p:cxnSp>
         <p:nvCxnSpPr>
-          <p:cNvPr id="174" name="Google Shape;140;p9"/>
+          <p:cNvPr id="197" name="Google Shape;140;p9"/>
           <p:cNvCxnSpPr/>
           <p:nvPr/>
         </p:nvCxnSpPr>
@@ -23853,7 +23889,7 @@
       </p:sp>
       <p:cxnSp>
         <p:nvCxnSpPr>
-          <p:cNvPr id="178" name="Google Shape;144;p9"/>
+          <p:cNvPr id="201" name="Google Shape;144;p9"/>
           <p:cNvCxnSpPr/>
           <p:nvPr/>
         </p:nvCxnSpPr>
@@ -24099,7 +24135,7 @@
       </p:sp>
       <p:cxnSp>
         <p:nvCxnSpPr>
-          <p:cNvPr id="182" name="Google Shape;148;p9"/>
+          <p:cNvPr id="205" name="Google Shape;148;p9"/>
           <p:cNvCxnSpPr/>
           <p:nvPr/>
         </p:nvCxnSpPr>
@@ -24852,7 +24888,7 @@
       </p:grpSpPr>
       <p:cxnSp>
         <p:nvCxnSpPr>
-          <p:cNvPr id="190" name="Google Shape;165;p10"/>
+          <p:cNvPr id="197" name="Google Shape;165;p10"/>
           <p:cNvCxnSpPr/>
           <p:nvPr/>
         </p:nvCxnSpPr>
@@ -24877,7 +24913,7 @@
       </p:cxnSp>
       <p:cxnSp>
         <p:nvCxnSpPr>
-          <p:cNvPr id="191" name="Google Shape;166;p10"/>
+          <p:cNvPr id="198" name="Google Shape;166;p10"/>
           <p:cNvCxnSpPr/>
           <p:nvPr/>
         </p:nvCxnSpPr>
@@ -25158,7 +25194,7 @@
       </p:sp>
       <p:cxnSp>
         <p:nvCxnSpPr>
-          <p:cNvPr id="196" name="Google Shape;171;p10"/>
+          <p:cNvPr id="203" name="Google Shape;171;p10"/>
           <p:cNvCxnSpPr/>
           <p:nvPr/>
         </p:nvCxnSpPr>
@@ -26360,7 +26396,7 @@
       </p:grpSpPr>
       <p:cxnSp>
         <p:nvCxnSpPr>
-          <p:cNvPr id="219" name="Google Shape;195;p11"/>
+          <p:cNvPr id="226" name="Google Shape;195;p11"/>
           <p:cNvCxnSpPr/>
           <p:nvPr/>
         </p:nvCxnSpPr>
@@ -26385,7 +26421,7 @@
       </p:cxnSp>
       <p:cxnSp>
         <p:nvCxnSpPr>
-          <p:cNvPr id="220" name="Google Shape;196;p11"/>
+          <p:cNvPr id="227" name="Google Shape;196;p11"/>
           <p:cNvCxnSpPr/>
           <p:nvPr/>
         </p:nvCxnSpPr>
@@ -26666,7 +26702,7 @@
       </p:sp>
       <p:cxnSp>
         <p:nvCxnSpPr>
-          <p:cNvPr id="225" name="Google Shape;201;p11"/>
+          <p:cNvPr id="232" name="Google Shape;201;p11"/>
           <p:cNvCxnSpPr/>
           <p:nvPr/>
         </p:nvCxnSpPr>
